--- a/tests/benchmark/architectural_slides/case_013_zoning_callouts/output.pptx
+++ b/tests/benchmark/architectural_slides/case_013_zoning_callouts/output.pptx
@@ -910,7 +910,7 @@
         <p:spPr>
           <a:xfrm>
             <a:off x="640080" y="411480"/>
-            <a:ext cx="7863840" cy="457200"/>
+            <a:ext cx="7863840" cy="601218"/>
           </a:xfrm>
           <a:prstGeom prst="rect">
             <a:avLst/>
@@ -948,8 +948,8 @@
         </p:nvSpPr>
         <p:spPr>
           <a:xfrm>
-            <a:off x="640080" y="944880"/>
-            <a:ext cx="4781093" cy="3211068"/>
+            <a:off x="640080" y="1088898"/>
+            <a:ext cx="4781093" cy="3067050"/>
           </a:xfrm>
           <a:prstGeom prst="rect">
             <a:avLst/>
@@ -973,7 +973,7 @@
         </p:nvSpPr>
         <p:spPr>
           <a:xfrm>
-            <a:off x="777240" y="2367534"/>
+            <a:off x="777240" y="2439543"/>
             <a:ext cx="4506773" cy="365760"/>
           </a:xfrm>
           <a:prstGeom prst="rect">
@@ -1012,8 +1012,8 @@
         </p:nvSpPr>
         <p:spPr>
           <a:xfrm>
-            <a:off x="5573573" y="944880"/>
-            <a:ext cx="2930347" cy="1191250"/>
+            <a:off x="5573573" y="1088898"/>
+            <a:ext cx="2930347" cy="1136523"/>
           </a:xfrm>
           <a:prstGeom prst="rect">
             <a:avLst/>
@@ -1068,8 +1068,8 @@
         </p:nvSpPr>
         <p:spPr>
           <a:xfrm>
-            <a:off x="5573573" y="2212330"/>
-            <a:ext cx="2930347" cy="622473"/>
+            <a:off x="5573573" y="2301621"/>
+            <a:ext cx="2930347" cy="592709"/>
           </a:xfrm>
           <a:prstGeom prst="rect">
             <a:avLst/>
@@ -1107,8 +1107,8 @@
         </p:nvSpPr>
         <p:spPr>
           <a:xfrm>
-            <a:off x="5573573" y="2872903"/>
-            <a:ext cx="2930347" cy="622473"/>
+            <a:off x="5573573" y="2932430"/>
+            <a:ext cx="2930347" cy="592709"/>
           </a:xfrm>
           <a:prstGeom prst="rect">
             <a:avLst/>
@@ -1146,8 +1146,8 @@
         </p:nvSpPr>
         <p:spPr>
           <a:xfrm>
-            <a:off x="5573573" y="3533475"/>
-            <a:ext cx="2930347" cy="622473"/>
+            <a:off x="5573573" y="3563239"/>
+            <a:ext cx="2930347" cy="592709"/>
           </a:xfrm>
           <a:prstGeom prst="rect">
             <a:avLst/>

--- a/tests/benchmark/architectural_slides/case_013_zoning_callouts/output.pptx
+++ b/tests/benchmark/architectural_slides/case_013_zoning_callouts/output.pptx
@@ -940,12 +940,19 @@
           </a:p>
         </p:txBody>
       </p:sp>
-      <p:sp>
-        <p:nvSpPr>
-          <p:cNvPr id="3" name="Shape 1"/>
-          <p:cNvSpPr/>
+      <p:pic>
+        <p:nvPicPr>
+          <p:cNvPr id="3" name="Image 0" descr="C:\Users\navib\Desktop\development\Archium-Agent\tests\benchmark\architectural_slides\case_013_zoning_callouts\assets\c0130001-0001-4001-8001-000000000001.png">    </p:cNvPr>
+          <p:cNvPicPr>
+            <a:picLocks noChangeAspect="1"/>
+          </p:cNvPicPr>
           <p:nvPr/>
-        </p:nvSpPr>
+        </p:nvPicPr>
+        <p:blipFill>
+          <a:blip r:embed="rId1"/>
+          <a:srcRect l="0" r="0" t="0" b="0"/>
+          <a:stretch/>
+        </p:blipFill>
         <p:spPr>
           <a:xfrm>
             <a:off x="640080" y="1088898"/>
@@ -954,59 +961,11 @@
           <a:prstGeom prst="rect">
             <a:avLst/>
           </a:prstGeom>
-          <a:solidFill>
-            <a:srgbClr val="FFFFFF"/>
-          </a:solidFill>
-          <a:ln w="19050">
-            <a:solidFill>
-              <a:srgbClr val="C47B2B"/>
-            </a:solidFill>
-            <a:prstDash val="dash"/>
-          </a:ln>
         </p:spPr>
-      </p:sp>
+      </p:pic>
       <p:sp>
         <p:nvSpPr>
-          <p:cNvPr id="4" name="Text 2"/>
-          <p:cNvSpPr/>
-          <p:nvPr/>
-        </p:nvSpPr>
-        <p:spPr>
-          <a:xfrm>
-            <a:off x="777240" y="2439543"/>
-            <a:ext cx="4506773" cy="365760"/>
-          </a:xfrm>
-          <a:prstGeom prst="rect">
-            <a:avLst/>
-          </a:prstGeom>
-          <a:noFill/>
-          <a:ln/>
-        </p:spPr>
-        <p:txBody>
-          <a:bodyPr wrap="square" rtlCol="0" anchor="ctr"/>
-          <a:lstStyle/>
-          <a:p>
-            <a:pPr algn="ctr" indent="0" marL="0">
-              <a:buNone/>
-            </a:pPr>
-            <a:r>
-              <a:rPr lang="en-US" sz="1200" dirty="0">
-                <a:solidFill>
-                  <a:srgbClr val="777777"/>
-                </a:solidFill>
-                <a:latin typeface="Microsoft YaHei" pitchFamily="34" charset="0"/>
-                <a:ea typeface="Microsoft YaHei" pitchFamily="34" charset="-122"/>
-                <a:cs typeface="Microsoft YaHei" pitchFamily="34" charset="-120"/>
-              </a:rPr>
-              <a:t>技术图纸缺失</a:t>
-            </a:r>
-            <a:endParaRPr lang="en-US" sz="1200" dirty="0"/>
-          </a:p>
-        </p:txBody>
-      </p:sp>
-      <p:sp>
-        <p:nvSpPr>
-          <p:cNvPr id="5" name="Text 3"/>
+          <p:cNvPr id="4" name="Text 1"/>
           <p:cNvSpPr/>
           <p:nvPr/>
         </p:nvSpPr>
@@ -1062,7 +1021,7 @@
       </p:sp>
       <p:sp>
         <p:nvSpPr>
-          <p:cNvPr id="6" name="Text 4"/>
+          <p:cNvPr id="5" name="Text 2"/>
           <p:cNvSpPr/>
           <p:nvPr/>
         </p:nvSpPr>
@@ -1101,7 +1060,7 @@
       </p:sp>
       <p:sp>
         <p:nvSpPr>
-          <p:cNvPr id="7" name="Text 5"/>
+          <p:cNvPr id="6" name="Text 3"/>
           <p:cNvSpPr/>
           <p:nvPr/>
         </p:nvSpPr>
@@ -1140,7 +1099,7 @@
       </p:sp>
       <p:sp>
         <p:nvSpPr>
-          <p:cNvPr id="8" name="Text 6"/>
+          <p:cNvPr id="7" name="Text 4"/>
           <p:cNvSpPr/>
           <p:nvPr/>
         </p:nvSpPr>
@@ -1179,7 +1138,7 @@
       </p:sp>
       <p:sp>
         <p:nvSpPr>
-          <p:cNvPr id="9" name="Text 7"/>
+          <p:cNvPr id="8" name="Text 5"/>
           <p:cNvSpPr/>
           <p:nvPr/>
         </p:nvSpPr>

--- a/tests/benchmark/architectural_slides/case_013_zoning_callouts/output.pptx
+++ b/tests/benchmark/architectural_slides/case_013_zoning_callouts/output.pptx
@@ -910,7 +910,7 @@
         <p:spPr>
           <a:xfrm>
             <a:off x="640080" y="411480"/>
-            <a:ext cx="7863840" cy="601218"/>
+            <a:ext cx="7863840" cy="621792"/>
           </a:xfrm>
           <a:prstGeom prst="rect">
             <a:avLst/>
@@ -955,8 +955,8 @@
         </p:blipFill>
         <p:spPr>
           <a:xfrm>
-            <a:off x="640080" y="1088898"/>
-            <a:ext cx="4781093" cy="3067050"/>
+            <a:off x="640080" y="1109472"/>
+            <a:ext cx="4781093" cy="3046476"/>
           </a:xfrm>
           <a:prstGeom prst="rect">
             <a:avLst/>
@@ -971,8 +971,8 @@
         </p:nvSpPr>
         <p:spPr>
           <a:xfrm>
-            <a:off x="5573573" y="1088898"/>
-            <a:ext cx="2930347" cy="1136523"/>
+            <a:off x="5573573" y="1109472"/>
+            <a:ext cx="2930347" cy="1128705"/>
           </a:xfrm>
           <a:prstGeom prst="rect">
             <a:avLst/>
@@ -1027,8 +1027,8 @@
         </p:nvSpPr>
         <p:spPr>
           <a:xfrm>
-            <a:off x="5573573" y="2301621"/>
-            <a:ext cx="2930347" cy="592709"/>
+            <a:off x="5573573" y="2314377"/>
+            <a:ext cx="2930347" cy="588457"/>
           </a:xfrm>
           <a:prstGeom prst="rect">
             <a:avLst/>
@@ -1066,8 +1066,8 @@
         </p:nvSpPr>
         <p:spPr>
           <a:xfrm>
-            <a:off x="5573573" y="2932430"/>
-            <a:ext cx="2930347" cy="592709"/>
+            <a:off x="5573573" y="2940934"/>
+            <a:ext cx="2930347" cy="588457"/>
           </a:xfrm>
           <a:prstGeom prst="rect">
             <a:avLst/>
@@ -1105,8 +1105,8 @@
         </p:nvSpPr>
         <p:spPr>
           <a:xfrm>
-            <a:off x="5573573" y="3563239"/>
-            <a:ext cx="2930347" cy="592709"/>
+            <a:off x="5573573" y="3567491"/>
+            <a:ext cx="2930347" cy="588457"/>
           </a:xfrm>
           <a:prstGeom prst="rect">
             <a:avLst/>

--- a/tests/benchmark/architectural_slides/case_013_zoning_callouts/output.pptx
+++ b/tests/benchmark/architectural_slides/case_013_zoning_callouts/output.pptx
@@ -910,7 +910,7 @@
         <p:spPr>
           <a:xfrm>
             <a:off x="640080" y="411480"/>
-            <a:ext cx="7863840" cy="621792"/>
+            <a:ext cx="7863840" cy="601218"/>
           </a:xfrm>
           <a:prstGeom prst="rect">
             <a:avLst/>
@@ -955,8 +955,8 @@
         </p:blipFill>
         <p:spPr>
           <a:xfrm>
-            <a:off x="640080" y="1109472"/>
-            <a:ext cx="4781093" cy="3046476"/>
+            <a:off x="640080" y="1088898"/>
+            <a:ext cx="4781093" cy="3067050"/>
           </a:xfrm>
           <a:prstGeom prst="rect">
             <a:avLst/>
@@ -971,8 +971,8 @@
         </p:nvSpPr>
         <p:spPr>
           <a:xfrm>
-            <a:off x="5573573" y="1109472"/>
-            <a:ext cx="2930347" cy="1128705"/>
+            <a:off x="5573573" y="1088898"/>
+            <a:ext cx="2930347" cy="1136523"/>
           </a:xfrm>
           <a:prstGeom prst="rect">
             <a:avLst/>
@@ -1027,8 +1027,8 @@
         </p:nvSpPr>
         <p:spPr>
           <a:xfrm>
-            <a:off x="5573573" y="2314377"/>
-            <a:ext cx="2930347" cy="588457"/>
+            <a:off x="5573573" y="2301621"/>
+            <a:ext cx="2930347" cy="592709"/>
           </a:xfrm>
           <a:prstGeom prst="rect">
             <a:avLst/>
@@ -1066,8 +1066,8 @@
         </p:nvSpPr>
         <p:spPr>
           <a:xfrm>
-            <a:off x="5573573" y="2940934"/>
-            <a:ext cx="2930347" cy="588457"/>
+            <a:off x="5573573" y="2932430"/>
+            <a:ext cx="2930347" cy="592709"/>
           </a:xfrm>
           <a:prstGeom prst="rect">
             <a:avLst/>
@@ -1105,8 +1105,8 @@
         </p:nvSpPr>
         <p:spPr>
           <a:xfrm>
-            <a:off x="5573573" y="3567491"/>
-            <a:ext cx="2930347" cy="588457"/>
+            <a:off x="5573573" y="3563239"/>
+            <a:ext cx="2930347" cy="592709"/>
           </a:xfrm>
           <a:prstGeom prst="rect">
             <a:avLst/>
